--- a/presentation/SH-MES_프로젝트보고.pptx
+++ b/presentation/SH-MES_프로젝트보고.pptx
@@ -3409,7 +3409,7 @@
                 </a:solidFill>
                 <a:latin typeface="맑은 고딕"/>
               </a:rPr>
-              <a:t>화성1공장 제조실행시스템 재구축 과제 보고</a:t>
+              <a:t>개인 프로젝트 · 제조실행시스템 설계 및 구현</a:t>
             </a:r>
           </a:p>
           <a:p>
@@ -3464,7 +3464,7 @@
                 </a:solidFill>
                 <a:latin typeface="맑은 고딕"/>
               </a:rPr>
-              <a:t>과제기간</a:t>
+              <a:t>프로젝트</a:t>
             </a:r>
           </a:p>
         </p:txBody>
@@ -3503,7 +3503,7 @@
                 </a:solidFill>
                 <a:latin typeface="맑은 고딕"/>
               </a:rPr>
-              <a:t>2026-07-01 ~ 10-31</a:t>
+              <a:t>프로젝트SH</a:t>
             </a:r>
           </a:p>
         </p:txBody>
@@ -3542,7 +3542,7 @@
                 </a:solidFill>
                 <a:latin typeface="맑은 고딕"/>
               </a:rPr>
-              <a:t>발주</a:t>
+              <a:t>구분</a:t>
             </a:r>
           </a:p>
         </p:txBody>
@@ -3581,7 +3581,7 @@
                 </a:solidFill>
                 <a:latin typeface="맑은 고딕"/>
               </a:rPr>
-              <a:t>생산본부 / 품질보증팀</a:t>
+              <a:t>개인 프로젝트</a:t>
             </a:r>
           </a:p>
         </p:txBody>
@@ -3620,7 +3620,7 @@
                 </a:solidFill>
                 <a:latin typeface="맑은 고딕"/>
               </a:rPr>
-              <a:t>수행</a:t>
+              <a:t>만든 사람</a:t>
             </a:r>
           </a:p>
         </p:txBody>
@@ -3659,7 +3659,7 @@
                 </a:solidFill>
                 <a:latin typeface="맑은 고딕"/>
               </a:rPr>
-              <a:t>정보시스템팀</a:t>
+              <a:t>남성흠</a:t>
             </a:r>
           </a:p>
         </p:txBody>
@@ -3698,7 +3698,7 @@
                 </a:solidFill>
                 <a:latin typeface="맑은 고딕"/>
               </a:rPr>
-              <a:t>진척</a:t>
+              <a:t>기간</a:t>
             </a:r>
           </a:p>
         </p:txBody>
@@ -3737,7 +3737,7 @@
                 </a:solidFill>
                 <a:latin typeface="맑은 고딕"/>
               </a:rPr>
-              <a:t>82%</a:t>
+              <a:t>2026-07-01 ~ 10-31</a:t>
             </a:r>
           </a:p>
         </p:txBody>
@@ -3776,7 +3776,7 @@
                 </a:solidFill>
                 <a:latin typeface="맑은 고딕"/>
               </a:rPr>
-              <a:t>보고일</a:t>
+              <a:t>진척</a:t>
             </a:r>
           </a:p>
         </p:txBody>
@@ -3815,7 +3815,7 @@
                 </a:solidFill>
                 <a:latin typeface="맑은 고딕"/>
               </a:rPr>
-              <a:t>2026-09-22</a:t>
+              <a:t>82%</a:t>
             </a:r>
           </a:p>
         </p:txBody>
@@ -14134,7 +14134,7 @@
                 </a:solidFill>
                 <a:latin typeface="맑은 고딕"/>
               </a:rPr>
-              <a:t>— 이 운영 프로세스를 생산본부와 별도 합의했다</a:t>
+              <a:t>— 이 운영 전제를 문서에 함께 남겼다</a:t>
             </a:r>
           </a:p>
         </p:txBody>
@@ -14651,7 +14651,7 @@
                 </a:solidFill>
                 <a:latin typeface="맑은 고딕"/>
               </a:rPr>
-              <a:t>· 현장 병행운영 2주 및 데이터 대사</a:t>
+              <a:t>· 목업 → REST API 전환 및 데이터 대사</a:t>
             </a:r>
           </a:p>
           <a:p>
@@ -14667,7 +14667,7 @@
                 </a:solidFill>
                 <a:latin typeface="맑은 고딕"/>
               </a:rPr>
-              <a:t>· 현장 작업자 교육 (조별 2회)</a:t>
+              <a:t>· 현장 관점 사용성 점검</a:t>
             </a:r>
           </a:p>
         </p:txBody>
@@ -14982,7 +14982,7 @@
         <p:spPr>
           <a:xfrm>
             <a:off x="749808" y="4485132"/>
-            <a:ext cx="6382512" cy="347472"/>
+            <a:ext cx="2465222" cy="347472"/>
           </a:xfrm>
           <a:prstGeom prst="rect">
             <a:avLst/>
@@ -15007,7 +15007,7 @@
                 </a:solidFill>
                 <a:latin typeface="맑은 고딕"/>
               </a:rPr>
-              <a:t>항목</a:t>
+              <a:t>구분</a:t>
             </a:r>
           </a:p>
         </p:txBody>
@@ -15020,8 +15020,8 @@
         </p:nvSpPr>
         <p:spPr>
           <a:xfrm>
-            <a:off x="7278624" y="4485132"/>
-            <a:ext cx="2029968" cy="347472"/>
+            <a:off x="3361334" y="4485132"/>
+            <a:ext cx="8123529" cy="347472"/>
           </a:xfrm>
           <a:prstGeom prst="rect">
             <a:avLst/>
@@ -15046,53 +15046,14 @@
                 </a:solidFill>
                 <a:latin typeface="맑은 고딕"/>
               </a:rPr>
-              <a:t>인원</a:t>
-            </a:r>
-          </a:p>
-        </p:txBody>
-      </p:sp>
-      <p:sp>
-        <p:nvSpPr>
-          <p:cNvPr id="21" name="TextBox 20"/>
-          <p:cNvSpPr txBox="1"/>
-          <p:nvPr/>
-        </p:nvSpPr>
-        <p:spPr>
-          <a:xfrm>
-            <a:off x="9454896" y="4485132"/>
-            <a:ext cx="2029968" cy="347472"/>
-          </a:xfrm>
-          <a:prstGeom prst="rect">
-            <a:avLst/>
-          </a:prstGeom>
-          <a:noFill/>
-        </p:spPr>
-        <p:txBody>
-          <a:bodyPr wrap="square" lIns="0" rIns="0" tIns="0" bIns="0" anchor="t">
-            <a:spAutoFit/>
-          </a:bodyPr>
-          <a:lstStyle/>
-          <a:p>
-            <a:pPr algn="l">
-              <a:spcAft>
-                <a:spcPts val="0"/>
-              </a:spcAft>
-            </a:pPr>
-            <a:r>
-              <a:rPr sz="1200" b="1">
-                <a:solidFill>
-                  <a:srgbClr val="8794A6"/>
-                </a:solidFill>
-                <a:latin typeface="맑은 고딕"/>
-              </a:rPr>
-              <a:t>투입 M/M</a:t>
-            </a:r>
-          </a:p>
-        </p:txBody>
-      </p:sp>
-      <p:sp>
-        <p:nvSpPr>
-          <p:cNvPr id="22" name="Rectangle 21"/>
+              <a:t>내용</a:t>
+            </a:r>
+          </a:p>
+        </p:txBody>
+      </p:sp>
+      <p:sp>
+        <p:nvSpPr>
+          <p:cNvPr id="21" name="Rectangle 20"/>
           <p:cNvSpPr/>
           <p:nvPr/>
         </p:nvSpPr>
@@ -15136,14 +15097,53 @@
       </p:sp>
       <p:sp>
         <p:nvSpPr>
+          <p:cNvPr id="22" name="TextBox 21"/>
+          <p:cNvSpPr txBox="1"/>
+          <p:nvPr/>
+        </p:nvSpPr>
+        <p:spPr>
+          <a:xfrm>
+            <a:off x="749808" y="4832604"/>
+            <a:ext cx="2465222" cy="347472"/>
+          </a:xfrm>
+          <a:prstGeom prst="rect">
+            <a:avLst/>
+          </a:prstGeom>
+          <a:noFill/>
+        </p:spPr>
+        <p:txBody>
+          <a:bodyPr wrap="square" lIns="0" rIns="0" tIns="0" bIns="0" anchor="t">
+            <a:spAutoFit/>
+          </a:bodyPr>
+          <a:lstStyle/>
+          <a:p>
+            <a:pPr algn="l">
+              <a:spcAft>
+                <a:spcPts val="0"/>
+              </a:spcAft>
+            </a:pPr>
+            <a:r>
+              <a:rPr sz="1200" b="0">
+                <a:solidFill>
+                  <a:srgbClr val="E4EAF2"/>
+                </a:solidFill>
+                <a:latin typeface="맑은 고딕"/>
+              </a:rPr>
+              <a:t>업무 화면</a:t>
+            </a:r>
+          </a:p>
+        </p:txBody>
+      </p:sp>
+      <p:sp>
+        <p:nvSpPr>
           <p:cNvPr id="23" name="TextBox 22"/>
           <p:cNvSpPr txBox="1"/>
           <p:nvPr/>
         </p:nvSpPr>
         <p:spPr>
           <a:xfrm>
-            <a:off x="749808" y="4832604"/>
-            <a:ext cx="6382512" cy="347472"/>
+            <a:off x="3361334" y="4832604"/>
+            <a:ext cx="8123529" cy="347472"/>
           </a:xfrm>
           <a:prstGeom prst="rect">
             <a:avLst/>
@@ -15168,92 +15168,14 @@
                 </a:solidFill>
                 <a:latin typeface="맑은 고딕"/>
               </a:rPr>
-              <a:t>PM / 개발 (김현우)</a:t>
-            </a:r>
-          </a:p>
-        </p:txBody>
-      </p:sp>
-      <p:sp>
-        <p:nvSpPr>
-          <p:cNvPr id="24" name="TextBox 23"/>
-          <p:cNvSpPr txBox="1"/>
-          <p:nvPr/>
-        </p:nvSpPr>
-        <p:spPr>
-          <a:xfrm>
-            <a:off x="7278624" y="4832604"/>
-            <a:ext cx="2029968" cy="347472"/>
-          </a:xfrm>
-          <a:prstGeom prst="rect">
-            <a:avLst/>
-          </a:prstGeom>
-          <a:noFill/>
-        </p:spPr>
-        <p:txBody>
-          <a:bodyPr wrap="square" lIns="0" rIns="0" tIns="0" bIns="0" anchor="t">
-            <a:spAutoFit/>
-          </a:bodyPr>
-          <a:lstStyle/>
-          <a:p>
-            <a:pPr algn="l">
-              <a:spcAft>
-                <a:spcPts val="0"/>
-              </a:spcAft>
-            </a:pPr>
-            <a:r>
-              <a:rPr sz="1200" b="0">
-                <a:solidFill>
-                  <a:srgbClr val="E4EAF2"/>
-                </a:solidFill>
-                <a:latin typeface="맑은 고딕"/>
-              </a:rPr>
-              <a:t>1</a:t>
-            </a:r>
-          </a:p>
-        </p:txBody>
-      </p:sp>
-      <p:sp>
-        <p:nvSpPr>
-          <p:cNvPr id="25" name="TextBox 24"/>
-          <p:cNvSpPr txBox="1"/>
-          <p:nvPr/>
-        </p:nvSpPr>
-        <p:spPr>
-          <a:xfrm>
-            <a:off x="9454896" y="4832604"/>
-            <a:ext cx="2029968" cy="347472"/>
-          </a:xfrm>
-          <a:prstGeom prst="rect">
-            <a:avLst/>
-          </a:prstGeom>
-          <a:noFill/>
-        </p:spPr>
-        <p:txBody>
-          <a:bodyPr wrap="square" lIns="0" rIns="0" tIns="0" bIns="0" anchor="t">
-            <a:spAutoFit/>
-          </a:bodyPr>
-          <a:lstStyle/>
-          <a:p>
-            <a:pPr algn="l">
-              <a:spcAft>
-                <a:spcPts val="0"/>
-              </a:spcAft>
-            </a:pPr>
-            <a:r>
-              <a:rPr sz="1200" b="0">
-                <a:solidFill>
-                  <a:srgbClr val="E4EAF2"/>
-                </a:solidFill>
-                <a:latin typeface="맑은 고딕"/>
-              </a:rPr>
-              <a:t>3.5</a:t>
-            </a:r>
-          </a:p>
-        </p:txBody>
-      </p:sp>
-      <p:sp>
-        <p:nvSpPr>
-          <p:cNvPr id="26" name="Rectangle 25"/>
+              <a:t>9종 (인트로 · 로그인 포함 11개 페이지)</a:t>
+            </a:r>
+          </a:p>
+        </p:txBody>
+      </p:sp>
+      <p:sp>
+        <p:nvSpPr>
+          <p:cNvPr id="24" name="Rectangle 23"/>
           <p:cNvSpPr/>
           <p:nvPr/>
         </p:nvSpPr>
@@ -15297,7 +15219,7 @@
       </p:sp>
       <p:sp>
         <p:nvSpPr>
-          <p:cNvPr id="27" name="Rectangle 26"/>
+          <p:cNvPr id="25" name="Rectangle 24"/>
           <p:cNvSpPr/>
           <p:nvPr/>
         </p:nvSpPr>
@@ -15341,14 +15263,14 @@
       </p:sp>
       <p:sp>
         <p:nvSpPr>
-          <p:cNvPr id="28" name="TextBox 27"/>
+          <p:cNvPr id="26" name="TextBox 25"/>
           <p:cNvSpPr txBox="1"/>
           <p:nvPr/>
         </p:nvSpPr>
         <p:spPr>
           <a:xfrm>
             <a:off x="749808" y="5180076"/>
-            <a:ext cx="6382512" cy="347472"/>
+            <a:ext cx="2465222" cy="347472"/>
           </a:xfrm>
           <a:prstGeom prst="rect">
             <a:avLst/>
@@ -15373,21 +15295,21 @@
                 </a:solidFill>
                 <a:latin typeface="맑은 고딕"/>
               </a:rPr>
-              <a:t>현업 분석 / 개발 (박성진)</a:t>
-            </a:r>
-          </a:p>
-        </p:txBody>
-      </p:sp>
-      <p:sp>
-        <p:nvSpPr>
-          <p:cNvPr id="29" name="TextBox 28"/>
-          <p:cNvSpPr txBox="1"/>
-          <p:nvPr/>
-        </p:nvSpPr>
-        <p:spPr>
-          <a:xfrm>
-            <a:off x="7278624" y="5180076"/>
-            <a:ext cx="2029968" cy="347472"/>
+              <a:t>공통 모듈</a:t>
+            </a:r>
+          </a:p>
+        </p:txBody>
+      </p:sp>
+      <p:sp>
+        <p:nvSpPr>
+          <p:cNvPr id="27" name="TextBox 26"/>
+          <p:cNvSpPr txBox="1"/>
+          <p:nvPr/>
+        </p:nvSpPr>
+        <p:spPr>
+          <a:xfrm>
+            <a:off x="3361334" y="5180076"/>
+            <a:ext cx="8123529" cy="347472"/>
           </a:xfrm>
           <a:prstGeom prst="rect">
             <a:avLst/>
@@ -15412,53 +15334,14 @@
                 </a:solidFill>
                 <a:latin typeface="맑은 고딕"/>
               </a:rPr>
-              <a:t>1</a:t>
-            </a:r>
-          </a:p>
-        </p:txBody>
-      </p:sp>
-      <p:sp>
-        <p:nvSpPr>
-          <p:cNvPr id="30" name="TextBox 29"/>
-          <p:cNvSpPr txBox="1"/>
-          <p:nvPr/>
-        </p:nvSpPr>
-        <p:spPr>
-          <a:xfrm>
-            <a:off x="9454896" y="5180076"/>
-            <a:ext cx="2029968" cy="347472"/>
-          </a:xfrm>
-          <a:prstGeom prst="rect">
-            <a:avLst/>
-          </a:prstGeom>
-          <a:noFill/>
-        </p:spPr>
-        <p:txBody>
-          <a:bodyPr wrap="square" lIns="0" rIns="0" tIns="0" bIns="0" anchor="t">
-            <a:spAutoFit/>
-          </a:bodyPr>
-          <a:lstStyle/>
-          <a:p>
-            <a:pPr algn="l">
-              <a:spcAft>
-                <a:spcPts val="0"/>
-              </a:spcAft>
-            </a:pPr>
-            <a:r>
-              <a:rPr sz="1200" b="0">
-                <a:solidFill>
-                  <a:srgbClr val="E4EAF2"/>
-                </a:solidFill>
-                <a:latin typeface="맑은 고딕"/>
-              </a:rPr>
-              <a:t>2.0</a:t>
-            </a:r>
-          </a:p>
-        </p:txBody>
-      </p:sp>
-      <p:sp>
-        <p:nvSpPr>
-          <p:cNvPr id="31" name="Rectangle 30"/>
+              <a:t>레이아웃/메뉴, 세션·권한, SVG 차트 5종, 목업 데이터셋</a:t>
+            </a:r>
+          </a:p>
+        </p:txBody>
+      </p:sp>
+      <p:sp>
+        <p:nvSpPr>
+          <p:cNvPr id="28" name="Rectangle 27"/>
           <p:cNvSpPr/>
           <p:nvPr/>
         </p:nvSpPr>
@@ -15502,14 +15385,14 @@
       </p:sp>
       <p:sp>
         <p:nvSpPr>
-          <p:cNvPr id="32" name="TextBox 31"/>
+          <p:cNvPr id="29" name="TextBox 28"/>
           <p:cNvSpPr txBox="1"/>
           <p:nvPr/>
         </p:nvSpPr>
         <p:spPr>
           <a:xfrm>
             <a:off x="749808" y="5527548"/>
-            <a:ext cx="6382512" cy="347472"/>
+            <a:ext cx="2465222" cy="347472"/>
           </a:xfrm>
           <a:prstGeom prst="rect">
             <a:avLst/>
@@ -15534,21 +15417,21 @@
                 </a:solidFill>
                 <a:latin typeface="맑은 고딕"/>
               </a:rPr>
-              <a:t>품질 도메인 / 검증 (이지혜)</a:t>
-            </a:r>
-          </a:p>
-        </p:txBody>
-      </p:sp>
-      <p:sp>
-        <p:nvSpPr>
-          <p:cNvPr id="33" name="TextBox 32"/>
-          <p:cNvSpPr txBox="1"/>
-          <p:nvPr/>
-        </p:nvSpPr>
-        <p:spPr>
-          <a:xfrm>
-            <a:off x="7278624" y="5527548"/>
-            <a:ext cx="2029968" cy="347472"/>
+              <a:t>문서</a:t>
+            </a:r>
+          </a:p>
+        </p:txBody>
+      </p:sp>
+      <p:sp>
+        <p:nvSpPr>
+          <p:cNvPr id="30" name="TextBox 29"/>
+          <p:cNvSpPr txBox="1"/>
+          <p:nvPr/>
+        </p:nvSpPr>
+        <p:spPr>
+          <a:xfrm>
+            <a:off x="3361334" y="5527548"/>
+            <a:ext cx="8123529" cy="347472"/>
           </a:xfrm>
           <a:prstGeom prst="rect">
             <a:avLst/>
@@ -15573,53 +15456,14 @@
                 </a:solidFill>
                 <a:latin typeface="맑은 고딕"/>
               </a:rPr>
-              <a:t>1</a:t>
-            </a:r>
-          </a:p>
-        </p:txBody>
-      </p:sp>
-      <p:sp>
-        <p:nvSpPr>
-          <p:cNvPr id="34" name="TextBox 33"/>
-          <p:cNvSpPr txBox="1"/>
-          <p:nvPr/>
-        </p:nvSpPr>
-        <p:spPr>
-          <a:xfrm>
-            <a:off x="9454896" y="5527548"/>
-            <a:ext cx="2029968" cy="347472"/>
-          </a:xfrm>
-          <a:prstGeom prst="rect">
-            <a:avLst/>
-          </a:prstGeom>
-          <a:noFill/>
-        </p:spPr>
-        <p:txBody>
-          <a:bodyPr wrap="square" lIns="0" rIns="0" tIns="0" bIns="0" anchor="t">
-            <a:spAutoFit/>
-          </a:bodyPr>
-          <a:lstStyle/>
-          <a:p>
-            <a:pPr algn="l">
-              <a:spcAft>
-                <a:spcPts val="0"/>
-              </a:spcAft>
-            </a:pPr>
-            <a:r>
-              <a:rPr sz="1200" b="0">
-                <a:solidFill>
-                  <a:srgbClr val="E4EAF2"/>
-                </a:solidFill>
-                <a:latin typeface="맑은 고딕"/>
-              </a:rPr>
-              <a:t>1.2</a:t>
-            </a:r>
-          </a:p>
-        </p:txBody>
-      </p:sp>
-      <p:sp>
-        <p:nvSpPr>
-          <p:cNvPr id="35" name="Rectangle 34"/>
+              <a:t>사전조사(100건) · 작업지시서 · 요구사항 · 화면설계 · 보고서</a:t>
+            </a:r>
+          </a:p>
+        </p:txBody>
+      </p:sp>
+      <p:sp>
+        <p:nvSpPr>
+          <p:cNvPr id="31" name="Rectangle 30"/>
           <p:cNvSpPr/>
           <p:nvPr/>
         </p:nvSpPr>
@@ -15663,7 +15507,7 @@
       </p:sp>
       <p:sp>
         <p:nvSpPr>
-          <p:cNvPr id="36" name="Rectangle 35"/>
+          <p:cNvPr id="32" name="Rectangle 31"/>
           <p:cNvSpPr/>
           <p:nvPr/>
         </p:nvSpPr>
@@ -15707,14 +15551,14 @@
       </p:sp>
       <p:sp>
         <p:nvSpPr>
-          <p:cNvPr id="37" name="TextBox 36"/>
+          <p:cNvPr id="33" name="TextBox 32"/>
           <p:cNvSpPr txBox="1"/>
           <p:nvPr/>
         </p:nvSpPr>
         <p:spPr>
           <a:xfrm>
             <a:off x="749808" y="5875020"/>
-            <a:ext cx="6382512" cy="347472"/>
+            <a:ext cx="2465222" cy="347472"/>
           </a:xfrm>
           <a:prstGeom prst="rect">
             <a:avLst/>
@@ -15739,21 +15583,21 @@
                 </a:solidFill>
                 <a:latin typeface="맑은 고딕"/>
               </a:rPr>
-              <a:t>합계</a:t>
-            </a:r>
-          </a:p>
-        </p:txBody>
-      </p:sp>
-      <p:sp>
-        <p:nvSpPr>
-          <p:cNvPr id="38" name="TextBox 37"/>
-          <p:cNvSpPr txBox="1"/>
-          <p:nvPr/>
-        </p:nvSpPr>
-        <p:spPr>
-          <a:xfrm>
-            <a:off x="7278624" y="5875020"/>
-            <a:ext cx="2029968" cy="347472"/>
+              <a:t>외부 의존성</a:t>
+            </a:r>
+          </a:p>
+        </p:txBody>
+      </p:sp>
+      <p:sp>
+        <p:nvSpPr>
+          <p:cNvPr id="34" name="TextBox 33"/>
+          <p:cNvSpPr txBox="1"/>
+          <p:nvPr/>
+        </p:nvSpPr>
+        <p:spPr>
+          <a:xfrm>
+            <a:off x="3361334" y="5875020"/>
+            <a:ext cx="8123529" cy="347472"/>
           </a:xfrm>
           <a:prstGeom prst="rect">
             <a:avLst/>
@@ -15778,46 +15622,7 @@
                 </a:solidFill>
                 <a:latin typeface="맑은 고딕"/>
               </a:rPr>
-              <a:t>3</a:t>
-            </a:r>
-          </a:p>
-        </p:txBody>
-      </p:sp>
-      <p:sp>
-        <p:nvSpPr>
-          <p:cNvPr id="39" name="TextBox 38"/>
-          <p:cNvSpPr txBox="1"/>
-          <p:nvPr/>
-        </p:nvSpPr>
-        <p:spPr>
-          <a:xfrm>
-            <a:off x="9454896" y="5875020"/>
-            <a:ext cx="2029968" cy="347472"/>
-          </a:xfrm>
-          <a:prstGeom prst="rect">
-            <a:avLst/>
-          </a:prstGeom>
-          <a:noFill/>
-        </p:spPr>
-        <p:txBody>
-          <a:bodyPr wrap="square" lIns="0" rIns="0" tIns="0" bIns="0" anchor="t">
-            <a:spAutoFit/>
-          </a:bodyPr>
-          <a:lstStyle/>
-          <a:p>
-            <a:pPr algn="l">
-              <a:spcAft>
-                <a:spcPts val="0"/>
-              </a:spcAft>
-            </a:pPr>
-            <a:r>
-              <a:rPr sz="1200" b="0">
-                <a:solidFill>
-                  <a:srgbClr val="00A9A5"/>
-                </a:solidFill>
-                <a:latin typeface="맑은 고딕"/>
-              </a:rPr>
-              <a:t>6.7</a:t>
+              <a:t>없음 — 프레임워크 · 차트 라이브러리 · CDN 미사용</a:t>
             </a:r>
           </a:p>
         </p:txBody>
@@ -16045,7 +15850,7 @@
                 </a:solidFill>
                 <a:latin typeface="맑은 고딕"/>
               </a:rPr>
-              <a:t>문의 : 정보시스템팀 김현우</a:t>
+              <a:t>만든 사람 : 남성흠  ·  프로젝트SH (개인 프로젝트)</a:t>
             </a:r>
           </a:p>
           <a:p>
@@ -18430,7 +18235,7 @@
                 </a:solidFill>
                 <a:latin typeface="맑은 고딕"/>
               </a:rPr>
-              <a:t>— 품질보증팀 인터뷰 (2026-06-18)</a:t>
+              <a:t>— 국내 MES 도입 사례에서 반복적으로 나오는 문제</a:t>
             </a:r>
           </a:p>
         </p:txBody>
